--- a/slides/Week2_Ingestion_Transformations.pptx
+++ b/slides/Week2_Ingestion_Transformations.pptx
@@ -304,8 +304,7 @@
           <a:lstStyle/>
           <a:p>
             <a:r>
-              <a:rPr lang="en-US" dirty="0"/>
-              <a:t>Open with the 5-question Week 1 retrieval quiz (DROP semantics, CTAS rule, hierarchy, time travel, volume path). Then the hook: who found the duplicates and NULLs in the Week 1 file? That dirty data is today's raw material.</a:t>
+              <a:t>Open with the Week 2 STARTER quiz (Markdown Mash, 5 questions on Week 1: DROP semantics, CTAS rule, hierarchy order, compute choice, medallion). Then the hook: who found the duplicates and NULLs in the Week 1 file? That dirty data is today's raw material.</a:t>
             </a:r>
           </a:p>
         </p:txBody>
@@ -409,8 +408,7 @@
           <a:lstStyle/>
           <a:p>
             <a:r>
-              <a:rPr lang="en-US" dirty="0"/>
-              <a:t>Two-question discriminator: (1) how many files / how often? (2) does schema drift or latency matter? Both are current and exam-listed. 'Best' = simplest tool that satisfies every stated constraint.</a:t>
+              <a:t>Read the ladder top-down: most managed at the top, most custom at the bottom. Lakeflow Connect for SaaS/databases; declarative pipelines wrap Auto Loader; COPY INTO + Auto Loader are the bronze file-ingestion sweet spot; MERGE handles row-level change in silver; CTAS is one-off only. Memory aid: production pipelines COMBINE these, not either/or. The graphic says 'DLT / Lakeflow Declarative Pipelines' — say the current name aloud: Lakeflow Spark Declarative Pipelines.</a:t>
             </a:r>
           </a:p>
         </p:txBody>
@@ -520,8 +518,7 @@
           <a:lstStyle/>
           <a:p>
             <a:r>
-              <a:rPr lang="en-US" dirty="0"/>
-              <a:t>Two-question discriminator: (1) how many files / how often? (2) does schema drift or latency matter? Both are current and exam-listed. 'Best' = simplest tool that satisfies every stated constraint.</a:t>
+              <a:t>Walk one ROW at a time — each row is an exam stem in disguise. Raw files: COPY INTO and Auto Loader both BEST. Rows changed/removed: MERGE is the ONLY correct tool. Streaming/near-real-time: Auto Loader. Renamed/moved file: COPY INTO and Auto Loader treat it as a new path and may duplicate — key-based MERGE avoids that. Shortcut to repeat: files landing → COPY INTO or Auto Loader; row-level changes → MERGE INTO.</a:t>
             </a:r>
           </a:p>
         </p:txBody>
@@ -631,8 +628,7 @@
           <a:lstStyle/>
           <a:p>
             <a:r>
-              <a:rPr lang="en-US" dirty="0"/>
-              <a:t>Two-question discriminator: (1) how many files / how often? (2) does schema drift or latency matter? Both are current and exam-listed. 'Best' = simplest tool that satisfies every stated constraint.</a:t>
+              <a:t>The composition picture: ingestion tools land BRONZE (COPY INTO batch, Auto Loader scale/streaming, Lakeflow Connect for SaaS/DBs); MERGE applies changes bronze→SILVER; GOLD serves BI. Declarative pipelines can orchestrate the whole flow with quality rules. When an exam question mixes ingestion and DML, first identify WHICH hop it is asking about — that alone eliminates two options.</a:t>
             </a:r>
           </a:p>
         </p:txBody>
@@ -4017,7 +4013,7 @@
                 <a:ea typeface="Arial" pitchFamily="34" charset="-122"/>
                 <a:cs typeface="Arial" pitchFamily="34" charset="-120"/>
               </a:rPr>
-              <a:t>WEEK 2  ·  JUNE 2026  ·  10</a:t>
+              <a:t>WEEK 2  ·  JUNE 2026  ·  13</a:t>
             </a:r>
             <a:endParaRPr lang="en-US" sz="800" dirty="0"/>
           </a:p>
@@ -5069,7 +5065,7 @@
                 <a:ea typeface="Arial" pitchFamily="34" charset="-122"/>
                 <a:cs typeface="Arial" pitchFamily="34" charset="-120"/>
               </a:rPr>
-              <a:t>WEEK 2  ·  JUNE 2026  ·  11</a:t>
+              <a:t>WEEK 2  ·  JUNE 2026  ·  14</a:t>
             </a:r>
             <a:endParaRPr lang="en-US" sz="800" dirty="0"/>
           </a:p>
@@ -5820,7 +5816,7 @@
                 <a:ea typeface="Arial" pitchFamily="34" charset="-122"/>
                 <a:cs typeface="Arial" pitchFamily="34" charset="-120"/>
               </a:rPr>
-              <a:t>WEEK 2  ·  JUNE 2026  ·  12</a:t>
+              <a:t>WEEK 2  ·  JUNE 2026  ·  15</a:t>
             </a:r>
             <a:endParaRPr lang="en-US" sz="800" dirty="0"/>
           </a:p>
@@ -6662,7 +6658,7 @@
                 <a:ea typeface="Arial" pitchFamily="34" charset="-122"/>
                 <a:cs typeface="Arial" pitchFamily="34" charset="-120"/>
               </a:rPr>
-              <a:t>WEEK 2  ·  JUNE 2026  ·  13</a:t>
+              <a:t>WEEK 2  ·  JUNE 2026  ·  16</a:t>
             </a:r>
             <a:endParaRPr lang="en-US" sz="800" dirty="0"/>
           </a:p>
@@ -7562,7 +7558,7 @@
                 <a:ea typeface="Arial" pitchFamily="34" charset="-122"/>
                 <a:cs typeface="Arial" pitchFamily="34" charset="-120"/>
               </a:rPr>
-              <a:t>WEEK 2  ·  JUNE 2026  ·  14</a:t>
+              <a:t>WEEK 2  ·  JUNE 2026  ·  17</a:t>
             </a:r>
             <a:endParaRPr lang="en-US" sz="800" dirty="0"/>
           </a:p>
@@ -8921,7 +8917,7 @@
                 <a:ea typeface="Arial" pitchFamily="34" charset="-122"/>
                 <a:cs typeface="Arial" pitchFamily="34" charset="-120"/>
               </a:rPr>
-              <a:t>WEEK 2  ·  JUNE 2026  ·  15</a:t>
+              <a:t>WEEK 2  ·  JUNE 2026  ·  18</a:t>
             </a:r>
             <a:endParaRPr lang="en-US" sz="800" dirty="0"/>
           </a:p>
@@ -9772,7 +9768,7 @@
                 <a:ea typeface="Arial" pitchFamily="34" charset="-122"/>
                 <a:cs typeface="Arial" pitchFamily="34" charset="-120"/>
               </a:rPr>
-              <a:t>WEEK 2  ·  JUNE 2026  ·  16</a:t>
+              <a:t>WEEK 2  ·  JUNE 2026  ·  19</a:t>
             </a:r>
             <a:endParaRPr lang="en-US" sz="800" dirty="0"/>
           </a:p>
@@ -11174,7 +11170,7 @@
                 <a:ea typeface="Arial" pitchFamily="34" charset="-122"/>
                 <a:cs typeface="Arial" pitchFamily="34" charset="-120"/>
               </a:rPr>
-              <a:t>WEEK 2  ·  JUNE 2026  ·  17</a:t>
+              <a:t>WEEK 2  ·  JUNE 2026  ·  20</a:t>
             </a:r>
             <a:endParaRPr lang="en-US" sz="800" dirty="0"/>
           </a:p>
@@ -11935,7 +11931,7 @@
                 <a:ea typeface="Arial" pitchFamily="34" charset="-122"/>
                 <a:cs typeface="Arial" pitchFamily="34" charset="-120"/>
               </a:rPr>
-              <a:t>WEEK 2  ·  JUNE 2026  ·  18</a:t>
+              <a:t>WEEK 2  ·  JUNE 2026  ·  21</a:t>
             </a:r>
             <a:endParaRPr lang="en-US" sz="800" dirty="0"/>
           </a:p>
@@ -12912,7 +12908,7 @@
                 <a:ea typeface="Arial" pitchFamily="34" charset="-122"/>
                 <a:cs typeface="Arial" pitchFamily="34" charset="-120"/>
               </a:rPr>
-              <a:t>WEEK 2  ·  JUNE 2026  ·  19</a:t>
+              <a:t>WEEK 2  ·  JUNE 2026  ·  22</a:t>
             </a:r>
             <a:endParaRPr lang="en-US" sz="800" dirty="0"/>
           </a:p>
@@ -14773,7 +14769,7 @@
                 <a:ea typeface="Arial" pitchFamily="34" charset="-122"/>
                 <a:cs typeface="Arial" pitchFamily="34" charset="-120"/>
               </a:rPr>
-              <a:t>WEEK 2  ·  JUNE 2026  ·  20</a:t>
+              <a:t>WEEK 2  ·  JUNE 2026  ·  23</a:t>
             </a:r>
             <a:endParaRPr lang="en-US" sz="800" dirty="0"/>
           </a:p>
